--- a/04-enablement/HR-AI-Literacy-Curriculum.pptx
+++ b/04-enablement/HR-AI-Literacy-Curriculum.pptx
@@ -7208,7 +7208,7 @@
                 <a:ea typeface="Calibri" pitchFamily="34" charset="-122"/>
                 <a:cs typeface="Calibri" pitchFamily="34" charset="-120"/>
               </a:rPr>
-              <a:t>AI trained on historical HR data can encode and amplify past discrimination. Annual adverse impact testing is not optional, it is legally and ethically required.</a:t>
+              <a:t>AI trained on historical HR data can encode and amplify past discrimination. Adverse impact testing is a core control, required by law in some places (NYC LL144 mandates an annual bias audit). Confirm cadence with Legal.</a:t>
             </a:r>
             <a:endParaRPr lang="en-US" sz="1100" dirty="0"/>
           </a:p>
